--- a/scientific-figures/examples/algorithm-example.pptx
+++ b/scientific-figures/examples/algorithm-example.pptx
@@ -7,7 +7,7 @@
   <p:sldIdLst>
     <p:sldId id="256" r:id="rId7"/>
   </p:sldIdLst>
-  <p:sldSz cx="6408000" cy="5970375" type="screen4x3"/>
+  <p:sldSz cx="6408000" cy="6887971" type="screen4x3"/>
   <p:notesSz cx="6858000" cy="9144000"/>
   <p:defaultTextStyle>
     <a:defPPr>
@@ -3096,8 +3096,8 @@
         </p:nvSpPr>
         <p:spPr>
           <a:xfrm>
-            <a:off x="1994694" y="446762"/>
-            <a:ext cx="2418611" cy="406147"/>
+            <a:off x="1901845" y="481064"/>
+            <a:ext cx="2604309" cy="437331"/>
           </a:xfrm>
           <a:prstGeom prst="homePlate">
             <a:avLst/>
@@ -3105,7 +3105,7 @@
           <a:solidFill>
             <a:srgbClr val="FFFFFF"/>
           </a:solidFill>
-          <a:ln w="10153">
+          <a:ln w="10933">
             <a:solidFill>
               <a:srgbClr val="1A1A1A"/>
             </a:solidFill>
@@ -3130,7 +3130,7 @@
           <a:lstStyle/>
           <a:p>
             <a:pPr>
-              <a:defRPr sz="1199">
+              <a:defRPr sz="1291">
                 <a:solidFill>
                   <a:srgbClr val="1A1A1A"/>
                 </a:solidFill>
@@ -3150,8 +3150,8 @@
         </p:nvSpPr>
         <p:spPr>
           <a:xfrm>
-            <a:off x="1955094" y="1401210"/>
-            <a:ext cx="2497810" cy="406147"/>
+            <a:off x="1859205" y="1508793"/>
+            <a:ext cx="2689588" cy="437331"/>
           </a:xfrm>
           <a:prstGeom prst="rect">
             <a:avLst/>
@@ -3159,7 +3159,7 @@
           <a:solidFill>
             <a:srgbClr val="FFFFFF"/>
           </a:solidFill>
-          <a:ln w="10153">
+          <a:ln w="10933">
             <a:solidFill>
               <a:srgbClr val="1A1A1A"/>
             </a:solidFill>
@@ -3184,7 +3184,7 @@
           <a:lstStyle/>
           <a:p>
             <a:pPr>
-              <a:defRPr sz="1199">
+              <a:defRPr sz="1291">
                 <a:solidFill>
                   <a:srgbClr val="1A1A1A"/>
                 </a:solidFill>
@@ -3204,8 +3204,8 @@
         </p:nvSpPr>
         <p:spPr>
           <a:xfrm>
-            <a:off x="2032770" y="2355658"/>
-            <a:ext cx="2342458" cy="406147"/>
+            <a:off x="1942845" y="2536522"/>
+            <a:ext cx="2522309" cy="437331"/>
           </a:xfrm>
           <a:prstGeom prst="rect">
             <a:avLst/>
@@ -3213,7 +3213,7 @@
           <a:solidFill>
             <a:srgbClr val="FFFFFF"/>
           </a:solidFill>
-          <a:ln w="10153">
+          <a:ln w="10933">
             <a:solidFill>
               <a:srgbClr val="1A1A1A"/>
             </a:solidFill>
@@ -3238,7 +3238,7 @@
           <a:lstStyle/>
           <a:p>
             <a:pPr>
-              <a:defRPr sz="1199">
+              <a:defRPr sz="1291">
                 <a:solidFill>
                   <a:srgbClr val="1A1A1A"/>
                 </a:solidFill>
@@ -3258,8 +3258,8 @@
         </p:nvSpPr>
         <p:spPr>
           <a:xfrm>
-            <a:off x="345225" y="3310106"/>
-            <a:ext cx="2820697" cy="406147"/>
+            <a:off x="371731" y="3564251"/>
+            <a:ext cx="2545269" cy="437331"/>
           </a:xfrm>
           <a:prstGeom prst="rect">
             <a:avLst/>
@@ -3267,7 +3267,7 @@
           <a:solidFill>
             <a:srgbClr val="FFFFFF"/>
           </a:solidFill>
-          <a:ln w="10153">
+          <a:ln w="10933">
             <a:solidFill>
               <a:srgbClr val="1A1A1A"/>
             </a:solidFill>
@@ -3292,7 +3292,7 @@
           <a:lstStyle/>
           <a:p>
             <a:pPr>
-              <a:defRPr sz="1199">
+              <a:defRPr sz="1291">
                 <a:solidFill>
                   <a:srgbClr val="1A1A1A"/>
                 </a:solidFill>
@@ -3312,8 +3312,8 @@
         </p:nvSpPr>
         <p:spPr>
           <a:xfrm>
-            <a:off x="3957912" y="3310106"/>
-            <a:ext cx="2104861" cy="406147"/>
+            <a:off x="3769797" y="3564251"/>
+            <a:ext cx="2266470" cy="437331"/>
           </a:xfrm>
           <a:prstGeom prst="rect">
             <a:avLst/>
@@ -3321,7 +3321,7 @@
           <a:solidFill>
             <a:srgbClr val="FFFFFF"/>
           </a:solidFill>
-          <a:ln w="10153">
+          <a:ln w="10933">
             <a:solidFill>
               <a:srgbClr val="1A1A1A"/>
             </a:solidFill>
@@ -3346,7 +3346,7 @@
           <a:lstStyle/>
           <a:p>
             <a:pPr>
-              <a:defRPr sz="1199">
+              <a:defRPr sz="1291">
                 <a:solidFill>
                   <a:srgbClr val="1A1A1A"/>
                 </a:solidFill>
@@ -3366,8 +3366,8 @@
         </p:nvSpPr>
         <p:spPr>
           <a:xfrm>
-            <a:off x="1942910" y="4264553"/>
-            <a:ext cx="2522179" cy="406147"/>
+            <a:off x="1846085" y="4821579"/>
+            <a:ext cx="2715828" cy="437331"/>
           </a:xfrm>
           <a:prstGeom prst="rect">
             <a:avLst/>
@@ -3375,7 +3375,7 @@
           <a:solidFill>
             <a:srgbClr val="FFFFFF"/>
           </a:solidFill>
-          <a:ln w="10153">
+          <a:ln w="10933">
             <a:solidFill>
               <a:srgbClr val="1A1A1A"/>
             </a:solidFill>
@@ -3400,7 +3400,7 @@
           <a:lstStyle/>
           <a:p>
             <a:pPr>
-              <a:defRPr sz="1199">
+              <a:defRPr sz="1291">
                 <a:solidFill>
                   <a:srgbClr val="1A1A1A"/>
                 </a:solidFill>
@@ -3420,8 +3420,8 @@
         </p:nvSpPr>
         <p:spPr>
           <a:xfrm>
-            <a:off x="1851527" y="5219001"/>
-            <a:ext cx="2704945" cy="406147"/>
+            <a:off x="2142924" y="5849308"/>
+            <a:ext cx="2122151" cy="437331"/>
           </a:xfrm>
           <a:prstGeom prst="homePlate">
             <a:avLst/>
@@ -3429,7 +3429,7 @@
           <a:solidFill>
             <a:srgbClr val="FFFFFF"/>
           </a:solidFill>
-          <a:ln w="10153">
+          <a:ln w="10933">
             <a:solidFill>
               <a:srgbClr val="0B6EA8"/>
             </a:solidFill>
@@ -3454,7 +3454,7 @@
           <a:lstStyle/>
           <a:p>
             <a:pPr>
-              <a:defRPr sz="1199">
+              <a:defRPr sz="1291">
                 <a:solidFill>
                   <a:srgbClr val="1A1A1A"/>
                 </a:solidFill>
@@ -3477,13 +3477,13 @@
         </p:nvCxnSpPr>
         <p:spPr>
           <a:xfrm flipH="1">
-            <a:off x="1955094" y="649835"/>
-            <a:ext cx="2458211" cy="954448"/>
+            <a:off x="1859205" y="699729"/>
+            <a:ext cx="2646949" cy="1027729"/>
           </a:xfrm>
           <a:prstGeom prst="line">
             <a:avLst/>
           </a:prstGeom>
-          <a:ln w="10153">
+          <a:ln w="10933">
             <a:solidFill>
               <a:srgbClr val="8E8E8E"/>
             </a:solidFill>
@@ -3516,13 +3516,13 @@
         </p:nvCxnSpPr>
         <p:spPr>
           <a:xfrm flipH="1">
-            <a:off x="2032770" y="1604283"/>
-            <a:ext cx="2420134" cy="954448"/>
+            <a:off x="1942845" y="1727458"/>
+            <a:ext cx="2605948" cy="1027729"/>
           </a:xfrm>
           <a:prstGeom prst="line">
             <a:avLst/>
           </a:prstGeom>
-          <a:ln w="10153">
+          <a:ln w="10933">
             <a:solidFill>
               <a:srgbClr val="8E8E8E"/>
             </a:solidFill>
@@ -3555,13 +3555,13 @@
         </p:nvCxnSpPr>
         <p:spPr>
           <a:xfrm flipH="1">
-            <a:off x="345225" y="2558731"/>
-            <a:ext cx="4030003" cy="954448"/>
+            <a:off x="371731" y="2755187"/>
+            <a:ext cx="4093423" cy="1027729"/>
           </a:xfrm>
           <a:prstGeom prst="line">
             <a:avLst/>
           </a:prstGeom>
-          <a:ln w="10153">
+          <a:ln w="10933">
             <a:solidFill>
               <a:srgbClr val="8E8E8E"/>
             </a:solidFill>
@@ -3594,13 +3594,13 @@
         </p:nvCxnSpPr>
         <p:spPr>
           <a:xfrm flipH="1">
-            <a:off x="3957912" y="2558731"/>
-            <a:ext cx="417316" cy="954448"/>
+            <a:off x="3769797" y="2755187"/>
+            <a:ext cx="695357" cy="1027729"/>
           </a:xfrm>
           <a:prstGeom prst="line">
             <a:avLst/>
           </a:prstGeom>
-          <a:ln w="10153">
+          <a:ln w="10933">
             <a:solidFill>
               <a:srgbClr val="8E8E8E"/>
             </a:solidFill>
@@ -3633,13 +3633,13 @@
         </p:nvCxnSpPr>
         <p:spPr>
           <a:xfrm flipH="1">
-            <a:off x="1942910" y="3513179"/>
-            <a:ext cx="4119863" cy="954447"/>
+            <a:off x="1846085" y="3782916"/>
+            <a:ext cx="4190182" cy="1257328"/>
           </a:xfrm>
           <a:prstGeom prst="line">
             <a:avLst/>
           </a:prstGeom>
-          <a:ln w="10153">
+          <a:ln w="10933">
             <a:solidFill>
               <a:srgbClr val="8E8E8E"/>
             </a:solidFill>
@@ -3672,13 +3672,13 @@
         </p:nvCxnSpPr>
         <p:spPr>
           <a:xfrm flipH="1">
-            <a:off x="1851527" y="4467626"/>
-            <a:ext cx="2613562" cy="954448"/>
+            <a:off x="2142924" y="5040244"/>
+            <a:ext cx="2418989" cy="1027729"/>
           </a:xfrm>
           <a:prstGeom prst="line">
             <a:avLst/>
           </a:prstGeom>
-          <a:ln w="15230">
+          <a:ln w="16399">
             <a:solidFill>
               <a:srgbClr val="0B6EA8"/>
             </a:solidFill>
@@ -3700,6 +3700,41 @@
           </a:fontRef>
         </p:style>
       </p:cxnSp>
+      <p:sp>
+        <p:nvSpPr>
+          <p:cNvPr id="15" name="TextBox 14"/>
+          <p:cNvSpPr txBox="1"/>
+          <p:nvPr/>
+        </p:nvSpPr>
+        <p:spPr>
+          <a:xfrm>
+            <a:off x="0" y="6671971"/>
+            <a:ext cx="6408000" cy="198000"/>
+          </a:xfrm>
+          <a:prstGeom prst="rect">
+            <a:avLst/>
+          </a:prstGeom>
+          <a:noFill/>
+        </p:spPr>
+        <p:txBody>
+          <a:bodyPr wrap="none">
+            <a:spAutoFit/>
+          </a:bodyPr>
+          <a:lstStyle/>
+          <a:p>
+            <a:pPr>
+              <a:defRPr sz="700" i="1">
+                <a:solidFill>
+                  <a:srgbClr val="B3261E"/>
+                </a:solidFill>
+              </a:defRPr>
+            </a:pPr>
+            <a:r>
+              <a:t>Export preview, not the figure: legend not reproduced.</a:t>
+            </a:r>
+          </a:p>
+        </p:txBody>
+      </p:sp>
     </p:spTree>
   </p:cSld>
   <p:clrMapOvr>
